--- a/Dia-3/Carrusel Presentaciones - FB 1080x1080.pptx
+++ b/Dia-3/Carrusel Presentaciones - FB 1080x1080.pptx
@@ -3088,7 +3088,7 @@
     <p:bg>
       <p:bgPr>
         <a:solidFill>
-          <a:srgbClr val="F5C13F"/>
+          <a:srgbClr val="14181F"/>
         </a:solidFill>
         <a:effectLst/>
       </p:bgPr>
@@ -3100,24 +3100,48 @@
         <p:nvPr/>
       </p:nvGrpSpPr>
       <p:grpSpPr/>
-      <p:sp>
-        <p:nvSpPr>
-          <p:cNvPr id="2" name="Oval 1"/>
+      <p:pic>
+        <p:nvPicPr>
+          <p:cNvPr id="2" name="Picture 1" descr="A_11_duo.png"/>
+          <p:cNvPicPr>
+            <a:picLocks noChangeAspect="1"/>
+          </p:cNvPicPr>
+          <p:nvPr/>
+        </p:nvPicPr>
+        <p:blipFill>
+          <a:blip r:embed="rId2"/>
+          <a:stretch>
+            <a:fillRect/>
+          </a:stretch>
+        </p:blipFill>
+        <p:spPr>
+          <a:xfrm>
+            <a:off x="0" y="0"/>
+            <a:ext cx="8229600" cy="8229600"/>
+          </a:xfrm>
+          <a:prstGeom prst="rect">
+            <a:avLst/>
+          </a:prstGeom>
+        </p:spPr>
+      </p:pic>
+      <p:sp>
+        <p:nvSpPr>
+          <p:cNvPr id="3" name="Rounded Rectangle 2"/>
           <p:cNvSpPr/>
           <p:nvPr/>
         </p:nvSpPr>
         <p:spPr>
           <a:xfrm>
-            <a:off x="4518051" y="2874172"/>
-            <a:ext cx="6748272" cy="8637788"/>
+            <a:off x="777240" y="777240"/>
+            <a:ext cx="1389888" cy="373380"/>
           </a:xfrm>
-          <a:prstGeom prst="ellipse">
-            <a:avLst/>
+          <a:prstGeom prst="roundRect">
+            <a:avLst>
+              <a:gd name="adj" fmla="val 50000"/>
+            </a:avLst>
           </a:prstGeom>
           <a:solidFill>
-            <a:srgbClr val="14181F">
-              <a:alpha val="16000"/>
-            </a:srgbClr>
+            <a:srgbClr val="F5C13F"/>
           </a:solidFill>
           <a:ln>
             <a:noFill/>
@@ -3139,23 +3163,32 @@
           </a:fontRef>
         </p:style>
         <p:txBody>
-          <a:bodyPr rtlCol="0" anchor="ctr"/>
+          <a:bodyPr rtlCol="0" anchor="ctr" wrap="none" lIns="128016" rIns="128016" tIns="18288" bIns="18288"/>
           <a:lstStyle/>
           <a:p>
             <a:pPr algn="ctr"/>
-          </a:p>
-        </p:txBody>
-      </p:sp>
-      <p:sp>
-        <p:nvSpPr>
-          <p:cNvPr id="3" name="TextBox 2"/>
+            <a:r>
+              <a:rPr sz="1500" b="1">
+                <a:solidFill>
+                  <a:srgbClr val="14181F"/>
+                </a:solidFill>
+                <a:latin typeface="Bricolage Grotesque"/>
+              </a:rPr>
+              <a:t>PRODUCTO</a:t>
+            </a:r>
+          </a:p>
+        </p:txBody>
+      </p:sp>
+      <p:sp>
+        <p:nvSpPr>
+          <p:cNvPr id="4" name="TextBox 3"/>
           <p:cNvSpPr txBox="1"/>
           <p:nvPr/>
         </p:nvSpPr>
         <p:spPr>
           <a:xfrm>
-            <a:off x="777240" y="777240"/>
-            <a:ext cx="6675120" cy="457200"/>
+            <a:off x="777240" y="1435608"/>
+            <a:ext cx="6675120" cy="2388107"/>
           </a:xfrm>
           <a:prstGeom prst="rect">
             <a:avLst/>
@@ -3174,26 +3207,1055 @@
               </a:lnSpc>
             </a:pPr>
             <a:r>
+              <a:rPr sz="4400" b="1">
+                <a:solidFill>
+                  <a:srgbClr val="FFFFFF"/>
+                </a:solidFill>
+                <a:latin typeface="Bricolage Grotesque"/>
+              </a:rPr>
+              <a:t>Conoce las cajas de Huevera 🥚</a:t>
+            </a:r>
+          </a:p>
+        </p:txBody>
+      </p:sp>
+      <p:sp>
+        <p:nvSpPr>
+          <p:cNvPr id="5" name="TextBox 4"/>
+          <p:cNvSpPr txBox="1"/>
+          <p:nvPr/>
+        </p:nvSpPr>
+        <p:spPr>
+          <a:xfrm>
+            <a:off x="777240" y="3823715"/>
+            <a:ext cx="6675120" cy="835660"/>
+          </a:xfrm>
+          <a:prstGeom prst="rect">
+            <a:avLst/>
+          </a:prstGeom>
+          <a:noFill/>
+        </p:spPr>
+        <p:txBody>
+          <a:bodyPr wrap="square" anchor="t" lIns="0" rIns="0" tIns="0" bIns="0">
+            <a:spAutoFit/>
+          </a:bodyPr>
+          <a:lstStyle/>
+          <a:p>
+            <a:pPr algn="l">
+              <a:lnSpc>
+                <a:spcPct val="110000"/>
+              </a:lnSpc>
+            </a:pPr>
+            <a:r>
+              <a:rPr sz="2200" b="0">
+                <a:solidFill>
+                  <a:srgbClr val="FFFFFF"/>
+                </a:solidFill>
+                <a:latin typeface="Hanken Grotesk"/>
+              </a:rPr>
+              <a:t>Elige la tuya.</a:t>
+            </a:r>
+          </a:p>
+        </p:txBody>
+      </p:sp>
+      <p:sp>
+        <p:nvSpPr>
+          <p:cNvPr id="6" name="TextBox 5"/>
+          <p:cNvSpPr txBox="1"/>
+          <p:nvPr/>
+        </p:nvSpPr>
+        <p:spPr>
+          <a:xfrm>
+            <a:off x="777240" y="7269480"/>
+            <a:ext cx="6675120" cy="548640"/>
+          </a:xfrm>
+          <a:prstGeom prst="rect">
+            <a:avLst/>
+          </a:prstGeom>
+          <a:noFill/>
+        </p:spPr>
+        <p:txBody>
+          <a:bodyPr wrap="square" anchor="t" lIns="0" rIns="0" tIns="0" bIns="0">
+            <a:spAutoFit/>
+          </a:bodyPr>
+          <a:lstStyle/>
+          <a:p>
+            <a:pPr algn="l">
+              <a:lnSpc>
+                <a:spcPct val="100000"/>
+              </a:lnSpc>
+            </a:pPr>
+            <a:r>
               <a:rPr sz="1800" b="1">
+                <a:solidFill>
+                  <a:srgbClr val="F5C13F"/>
+                </a:solidFill>
+                <a:latin typeface="Bricolage Grotesque"/>
+              </a:rPr>
+              <a:t>●  </a:t>
+            </a:r>
+            <a:r>
+              <a:rPr sz="1800" b="1">
+                <a:solidFill>
+                  <a:srgbClr val="FFFFFF"/>
+                </a:solidFill>
+                <a:latin typeface="Bricolage Grotesque"/>
+              </a:rPr>
+              <a:t>Huevera   @huevera.cl</a:t>
+            </a:r>
+          </a:p>
+        </p:txBody>
+      </p:sp>
+      <p:sp>
+        <p:nvSpPr>
+          <p:cNvPr id="7" name="TextBox 6"/>
+          <p:cNvSpPr txBox="1"/>
+          <p:nvPr/>
+        </p:nvSpPr>
+        <p:spPr>
+          <a:xfrm>
+            <a:off x="5166360" y="7223760"/>
+            <a:ext cx="2286000" cy="548640"/>
+          </a:xfrm>
+          <a:prstGeom prst="rect">
+            <a:avLst/>
+          </a:prstGeom>
+          <a:noFill/>
+        </p:spPr>
+        <p:txBody>
+          <a:bodyPr wrap="square" anchor="t" lIns="0" rIns="0" tIns="0" bIns="0">
+            <a:spAutoFit/>
+          </a:bodyPr>
+          <a:lstStyle/>
+          <a:p>
+            <a:pPr algn="r">
+              <a:lnSpc>
+                <a:spcPct val="100000"/>
+              </a:lnSpc>
+            </a:pPr>
+            <a:r>
+              <a:rPr sz="2000" b="1">
+                <a:solidFill>
+                  <a:srgbClr val="FFFFFF"/>
+                </a:solidFill>
+                <a:latin typeface="Bricolage Grotesque"/>
+              </a:rPr>
+              <a:t>Desliza →</a:t>
+            </a:r>
+          </a:p>
+        </p:txBody>
+      </p:sp>
+    </p:spTree>
+  </p:cSld>
+  <p:clrMapOvr>
+    <a:masterClrMapping/>
+  </p:clrMapOvr>
+</p:sld>
+</file>
+
+<file path=ppt/slides/slide2.xml><?xml version="1.0" encoding="utf-8"?>
+<p:sld xmlns:a="http://schemas.openxmlformats.org/drawingml/2006/main" xmlns:p="http://schemas.openxmlformats.org/presentationml/2006/main" xmlns:r="http://schemas.openxmlformats.org/officeDocument/2006/relationships">
+  <p:cSld>
+    <p:bg>
+      <p:bgPr>
+        <a:solidFill>
+          <a:srgbClr val="14181F"/>
+        </a:solidFill>
+        <a:effectLst/>
+      </p:bgPr>
+    </p:bg>
+    <p:spTree>
+      <p:nvGrpSpPr>
+        <p:cNvPr id="1" name=""/>
+        <p:cNvGrpSpPr/>
+        <p:nvPr/>
+      </p:nvGrpSpPr>
+      <p:grpSpPr/>
+      <p:sp>
+        <p:nvSpPr>
+          <p:cNvPr id="2" name="Rounded Rectangle 1"/>
+          <p:cNvSpPr/>
+          <p:nvPr/>
+        </p:nvSpPr>
+        <p:spPr>
+          <a:xfrm>
+            <a:off x="777240" y="1188720"/>
+            <a:ext cx="1641348" cy="373380"/>
+          </a:xfrm>
+          <a:prstGeom prst="roundRect">
+            <a:avLst>
+              <a:gd name="adj" fmla="val 50000"/>
+            </a:avLst>
+          </a:prstGeom>
+          <a:solidFill>
+            <a:srgbClr val="F5C13F"/>
+          </a:solidFill>
+          <a:ln>
+            <a:noFill/>
+          </a:ln>
+          <a:effectLst/>
+        </p:spPr>
+        <p:style>
+          <a:lnRef idx="1">
+            <a:schemeClr val="accent1"/>
+          </a:lnRef>
+          <a:fillRef idx="3">
+            <a:schemeClr val="accent1"/>
+          </a:fillRef>
+          <a:effectRef idx="2">
+            <a:schemeClr val="accent1"/>
+          </a:effectRef>
+          <a:fontRef idx="minor">
+            <a:schemeClr val="lt1"/>
+          </a:fontRef>
+        </p:style>
+        <p:txBody>
+          <a:bodyPr rtlCol="0" anchor="ctr" wrap="none" lIns="128016" rIns="128016" tIns="18288" bIns="18288"/>
+          <a:lstStyle/>
+          <a:p>
+            <a:pPr algn="ctr"/>
+            <a:r>
+              <a:rPr sz="1500" b="1">
+                <a:solidFill>
+                  <a:srgbClr val="14181F"/>
+                </a:solidFill>
+                <a:latin typeface="Bricolage Grotesque"/>
+              </a:rPr>
+              <a:t>CAJA SUPER</a:t>
+            </a:r>
+          </a:p>
+        </p:txBody>
+      </p:sp>
+      <p:sp>
+        <p:nvSpPr>
+          <p:cNvPr id="3" name="TextBox 2"/>
+          <p:cNvSpPr txBox="1"/>
+          <p:nvPr/>
+        </p:nvSpPr>
+        <p:spPr>
+          <a:xfrm>
+            <a:off x="777240" y="1847088"/>
+            <a:ext cx="6675120" cy="1981199"/>
+          </a:xfrm>
+          <a:prstGeom prst="rect">
+            <a:avLst/>
+          </a:prstGeom>
+          <a:noFill/>
+        </p:spPr>
+        <p:txBody>
+          <a:bodyPr wrap="square" anchor="t" lIns="0" rIns="0" tIns="0" bIns="0">
+            <a:spAutoFit/>
+          </a:bodyPr>
+          <a:lstStyle/>
+          <a:p>
+            <a:pPr algn="l">
+              <a:lnSpc>
+                <a:spcPct val="90000"/>
+              </a:lnSpc>
+            </a:pPr>
+            <a:r>
+              <a:rPr sz="15000" b="1">
+                <a:solidFill>
+                  <a:srgbClr val="F5C13F"/>
+                </a:solidFill>
+                <a:latin typeface="Bricolage Grotesque"/>
+              </a:rPr>
+              <a:t>100</a:t>
+            </a:r>
+          </a:p>
+        </p:txBody>
+      </p:sp>
+      <p:sp>
+        <p:nvSpPr>
+          <p:cNvPr id="4" name="Rectangle 3"/>
+          <p:cNvSpPr/>
+          <p:nvPr/>
+        </p:nvSpPr>
+        <p:spPr>
+          <a:xfrm>
+            <a:off x="777240" y="3938015"/>
+            <a:ext cx="1554480" cy="146304"/>
+          </a:xfrm>
+          <a:prstGeom prst="rect">
+            <a:avLst/>
+          </a:prstGeom>
+          <a:solidFill>
+            <a:srgbClr val="F5C13F"/>
+          </a:solidFill>
+          <a:ln>
+            <a:noFill/>
+          </a:ln>
+          <a:effectLst/>
+        </p:spPr>
+        <p:style>
+          <a:lnRef idx="1">
+            <a:schemeClr val="accent1"/>
+          </a:lnRef>
+          <a:fillRef idx="3">
+            <a:schemeClr val="accent1"/>
+          </a:fillRef>
+          <a:effectRef idx="2">
+            <a:schemeClr val="accent1"/>
+          </a:effectRef>
+          <a:fontRef idx="minor">
+            <a:schemeClr val="lt1"/>
+          </a:fontRef>
+        </p:style>
+        <p:txBody>
+          <a:bodyPr rtlCol="0" anchor="ctr"/>
+          <a:lstStyle/>
+          <a:p>
+            <a:pPr algn="ctr"/>
+          </a:p>
+        </p:txBody>
+      </p:sp>
+      <p:sp>
+        <p:nvSpPr>
+          <p:cNvPr id="5" name="TextBox 4"/>
+          <p:cNvSpPr txBox="1"/>
+          <p:nvPr/>
+        </p:nvSpPr>
+        <p:spPr>
+          <a:xfrm>
+            <a:off x="777240" y="4395215"/>
+            <a:ext cx="6675120" cy="2388107"/>
+          </a:xfrm>
+          <a:prstGeom prst="rect">
+            <a:avLst/>
+          </a:prstGeom>
+          <a:noFill/>
+        </p:spPr>
+        <p:txBody>
+          <a:bodyPr wrap="square" anchor="t" lIns="0" rIns="0" tIns="0" bIns="0">
+            <a:spAutoFit/>
+          </a:bodyPr>
+          <a:lstStyle/>
+          <a:p>
+            <a:pPr algn="l">
+              <a:lnSpc>
+                <a:spcPct val="100000"/>
+              </a:lnSpc>
+            </a:pPr>
+            <a:r>
+              <a:rPr sz="4400" b="1">
+                <a:solidFill>
+                  <a:srgbClr val="FFFFFF"/>
+                </a:solidFill>
+                <a:latin typeface="Bricolage Grotesque"/>
+              </a:rPr>
+              <a:t>100 huevos — la más económica.</a:t>
+            </a:r>
+          </a:p>
+        </p:txBody>
+      </p:sp>
+      <p:sp>
+        <p:nvSpPr>
+          <p:cNvPr id="6" name="TextBox 5"/>
+          <p:cNvSpPr txBox="1"/>
+          <p:nvPr/>
+        </p:nvSpPr>
+        <p:spPr>
+          <a:xfrm>
+            <a:off x="777240" y="6783322"/>
+            <a:ext cx="6675120" cy="899160"/>
+          </a:xfrm>
+          <a:prstGeom prst="rect">
+            <a:avLst/>
+          </a:prstGeom>
+          <a:noFill/>
+        </p:spPr>
+        <p:txBody>
+          <a:bodyPr wrap="square" anchor="t" lIns="0" rIns="0" tIns="0" bIns="0">
+            <a:spAutoFit/>
+          </a:bodyPr>
+          <a:lstStyle/>
+          <a:p>
+            <a:pPr algn="l">
+              <a:lnSpc>
+                <a:spcPct val="110000"/>
+              </a:lnSpc>
+            </a:pPr>
+            <a:r>
+              <a:rPr sz="2400" b="0">
+                <a:solidFill>
+                  <a:srgbClr val="FFFFFF"/>
+                </a:solidFill>
+                <a:latin typeface="Hanken Grotesk"/>
+              </a:rPr>
+              <a:t>Para abastecer la casa.</a:t>
+            </a:r>
+          </a:p>
+        </p:txBody>
+      </p:sp>
+    </p:spTree>
+  </p:cSld>
+  <p:clrMapOvr>
+    <a:masterClrMapping/>
+  </p:clrMapOvr>
+</p:sld>
+</file>
+
+<file path=ppt/slides/slide3.xml><?xml version="1.0" encoding="utf-8"?>
+<p:sld xmlns:a="http://schemas.openxmlformats.org/drawingml/2006/main" xmlns:p="http://schemas.openxmlformats.org/presentationml/2006/main" xmlns:r="http://schemas.openxmlformats.org/officeDocument/2006/relationships">
+  <p:cSld>
+    <p:bg>
+      <p:bgPr>
+        <a:solidFill>
+          <a:srgbClr val="FFFFFF"/>
+        </a:solidFill>
+        <a:effectLst/>
+      </p:bgPr>
+    </p:bg>
+    <p:spTree>
+      <p:nvGrpSpPr>
+        <p:cNvPr id="1" name=""/>
+        <p:cNvGrpSpPr/>
+        <p:nvPr/>
+      </p:nvGrpSpPr>
+      <p:grpSpPr/>
+      <p:sp>
+        <p:nvSpPr>
+          <p:cNvPr id="2" name="Rounded Rectangle 1"/>
+          <p:cNvSpPr/>
+          <p:nvPr/>
+        </p:nvSpPr>
+        <p:spPr>
+          <a:xfrm>
+            <a:off x="777240" y="777240"/>
+            <a:ext cx="1767078" cy="373380"/>
+          </a:xfrm>
+          <a:prstGeom prst="roundRect">
+            <a:avLst>
+              <a:gd name="adj" fmla="val 50000"/>
+            </a:avLst>
+          </a:prstGeom>
+          <a:solidFill>
+            <a:srgbClr val="F5C13F"/>
+          </a:solidFill>
+          <a:ln>
+            <a:noFill/>
+          </a:ln>
+          <a:effectLst/>
+        </p:spPr>
+        <p:style>
+          <a:lnRef idx="1">
+            <a:schemeClr val="accent1"/>
+          </a:lnRef>
+          <a:fillRef idx="3">
+            <a:schemeClr val="accent1"/>
+          </a:fillRef>
+          <a:effectRef idx="2">
+            <a:schemeClr val="accent1"/>
+          </a:effectRef>
+          <a:fontRef idx="minor">
+            <a:schemeClr val="lt1"/>
+          </a:fontRef>
+        </p:style>
+        <p:txBody>
+          <a:bodyPr rtlCol="0" anchor="ctr" wrap="none" lIns="128016" rIns="128016" tIns="18288" bIns="18288"/>
+          <a:lstStyle/>
+          <a:p>
+            <a:pPr algn="ctr"/>
+            <a:r>
+              <a:rPr sz="1500" b="1">
+                <a:solidFill>
+                  <a:srgbClr val="14181F"/>
+                </a:solidFill>
+                <a:latin typeface="Bricolage Grotesque"/>
+              </a:rPr>
+              <a:t>LAS 3 CAJAS</a:t>
+            </a:r>
+          </a:p>
+        </p:txBody>
+      </p:sp>
+      <p:sp>
+        <p:nvSpPr>
+          <p:cNvPr id="3" name="TextBox 2"/>
+          <p:cNvSpPr txBox="1"/>
+          <p:nvPr/>
+        </p:nvSpPr>
+        <p:spPr>
+          <a:xfrm>
+            <a:off x="777240" y="1435608"/>
+            <a:ext cx="6675120" cy="1911858"/>
+          </a:xfrm>
+          <a:prstGeom prst="rect">
+            <a:avLst/>
+          </a:prstGeom>
+          <a:noFill/>
+        </p:spPr>
+        <p:txBody>
+          <a:bodyPr wrap="square" anchor="t" lIns="0" rIns="0" tIns="0" bIns="0">
+            <a:spAutoFit/>
+          </a:bodyPr>
+          <a:lstStyle/>
+          <a:p>
+            <a:pPr algn="l">
+              <a:lnSpc>
+                <a:spcPct val="100000"/>
+              </a:lnSpc>
+            </a:pPr>
+            <a:r>
+              <a:rPr sz="3400" b="1">
+                <a:solidFill>
+                  <a:srgbClr val="14181F"/>
+                </a:solidFill>
+                <a:latin typeface="Bricolage Grotesque"/>
+              </a:rPr>
+              <a:t>Elige según cuánto consumes</a:t>
+            </a:r>
+          </a:p>
+        </p:txBody>
+      </p:sp>
+      <p:graphicFrame>
+        <p:nvGraphicFramePr>
+          <p:cNvPr id="4" name="Table 3"/>
+          <p:cNvGraphicFramePr>
+            <a:graphicFrameLocks noGrp="1"/>
+          </p:cNvGraphicFramePr>
+          <p:nvPr/>
+        </p:nvGraphicFramePr>
+        <p:xfrm>
+          <a:off x="777240" y="3347466"/>
+          <a:ext cx="6675120" cy="2359152"/>
+        </p:xfrm>
+        <a:graphic>
+          <a:graphicData uri="http://schemas.openxmlformats.org/drawingml/2006/table">
+            <a:tbl>
+              <a:tblPr firstRow="1">
+                <a:tableStyleId>{5C22544A-7EE6-4342-B048-85BDC9FD1C3A}</a:tableStyleId>
+              </a:tblPr>
+              <a:tblGrid>
+                <a:gridCol w="4171950"/>
+                <a:gridCol w="2503170"/>
+              </a:tblGrid>
+              <a:tr h="548640">
+                <a:tc>
+                  <a:txBody>
+                    <a:bodyPr wrap="square"/>
+                    <a:lstStyle/>
+                    <a:p>
+                      <a:pPr algn="l"/>
+                      <a:r>
+                        <a:rPr sz="1500" b="1">
+                          <a:solidFill>
+                            <a:srgbClr val="14181F"/>
+                          </a:solidFill>
+                          <a:latin typeface="Bricolage Grotesque"/>
+                        </a:rPr>
+                        <a:t>Caja</a:t>
+                      </a:r>
+                    </a:p>
+                  </a:txBody>
+                  <a:tcPr marL="128016" marR="73152" marT="27432" marB="27432" anchor="ctr">
+                    <a:solidFill>
+                      <a:srgbClr val="F5C13F"/>
+                    </a:solidFill>
+                  </a:tcPr>
+                </a:tc>
+                <a:tc>
+                  <a:txBody>
+                    <a:bodyPr wrap="square"/>
+                    <a:lstStyle/>
+                    <a:p>
+                      <a:pPr algn="l"/>
+                      <a:r>
+                        <a:rPr sz="1500" b="1">
+                          <a:solidFill>
+                            <a:srgbClr val="14181F"/>
+                          </a:solidFill>
+                          <a:latin typeface="Bricolage Grotesque"/>
+                        </a:rPr>
+                        <a:t>Huevos</a:t>
+                      </a:r>
+                    </a:p>
+                  </a:txBody>
+                  <a:tcPr marL="128016" marR="73152" marT="27432" marB="27432" anchor="ctr">
+                    <a:solidFill>
+                      <a:srgbClr val="F5C13F"/>
+                    </a:solidFill>
+                  </a:tcPr>
+                </a:tc>
+              </a:tr>
+              <a:tr h="603504">
+                <a:tc>
+                  <a:txBody>
+                    <a:bodyPr wrap="square"/>
+                    <a:lstStyle/>
+                    <a:p>
+                      <a:pPr algn="l"/>
+                      <a:r>
+                        <a:rPr sz="1800" b="1">
+                          <a:solidFill>
+                            <a:srgbClr val="F5C13F"/>
+                          </a:solidFill>
+                          <a:latin typeface="Bricolage Grotesque"/>
+                        </a:rPr>
+                        <a:t>Super</a:t>
+                      </a:r>
+                    </a:p>
+                  </a:txBody>
+                  <a:tcPr marL="128016" marR="73152" marT="27432" marB="27432" anchor="ctr">
+                    <a:solidFill>
+                      <a:srgbClr val="202630"/>
+                    </a:solidFill>
+                  </a:tcPr>
+                </a:tc>
+                <a:tc>
+                  <a:txBody>
+                    <a:bodyPr wrap="square"/>
+                    <a:lstStyle/>
+                    <a:p>
+                      <a:pPr algn="l"/>
+                      <a:r>
+                        <a:rPr sz="1800" b="0">
+                          <a:solidFill>
+                            <a:srgbClr val="FFFFFF"/>
+                          </a:solidFill>
+                          <a:latin typeface="Bricolage Grotesque"/>
+                        </a:rPr>
+                        <a:t>100</a:t>
+                      </a:r>
+                    </a:p>
+                  </a:txBody>
+                  <a:tcPr marL="128016" marR="73152" marT="27432" marB="27432" anchor="ctr">
+                    <a:solidFill>
+                      <a:srgbClr val="202630"/>
+                    </a:solidFill>
+                  </a:tcPr>
+                </a:tc>
+              </a:tr>
+              <a:tr h="603504">
+                <a:tc>
+                  <a:txBody>
+                    <a:bodyPr wrap="square"/>
+                    <a:lstStyle/>
+                    <a:p>
+                      <a:pPr algn="l"/>
+                      <a:r>
+                        <a:rPr sz="1800" b="1">
+                          <a:solidFill>
+                            <a:srgbClr val="F5C13F"/>
+                          </a:solidFill>
+                          <a:latin typeface="Bricolage Grotesque"/>
+                        </a:rPr>
+                        <a:t>Blanco</a:t>
+                      </a:r>
+                    </a:p>
+                  </a:txBody>
+                  <a:tcPr marL="128016" marR="73152" marT="27432" marB="27432" anchor="ctr">
+                    <a:solidFill>
+                      <a:srgbClr val="14181F"/>
+                    </a:solidFill>
+                  </a:tcPr>
+                </a:tc>
+                <a:tc>
+                  <a:txBody>
+                    <a:bodyPr wrap="square"/>
+                    <a:lstStyle/>
+                    <a:p>
+                      <a:pPr algn="l"/>
+                      <a:r>
+                        <a:rPr sz="1800" b="0">
+                          <a:solidFill>
+                            <a:srgbClr val="FFFFFF"/>
+                          </a:solidFill>
+                          <a:latin typeface="Bricolage Grotesque"/>
+                        </a:rPr>
+                        <a:t>180</a:t>
+                      </a:r>
+                    </a:p>
+                  </a:txBody>
+                  <a:tcPr marL="128016" marR="73152" marT="27432" marB="27432" anchor="ctr">
+                    <a:solidFill>
+                      <a:srgbClr val="14181F"/>
+                    </a:solidFill>
+                  </a:tcPr>
+                </a:tc>
+              </a:tr>
+              <a:tr h="603504">
+                <a:tc>
+                  <a:txBody>
+                    <a:bodyPr wrap="square"/>
+                    <a:lstStyle/>
+                    <a:p>
+                      <a:pPr algn="l"/>
+                      <a:r>
+                        <a:rPr sz="1800" b="1">
+                          <a:solidFill>
+                            <a:srgbClr val="F5C13F"/>
+                          </a:solidFill>
+                          <a:latin typeface="Bricolage Grotesque"/>
+                        </a:rPr>
+                        <a:t>Color</a:t>
+                      </a:r>
+                    </a:p>
+                  </a:txBody>
+                  <a:tcPr marL="128016" marR="73152" marT="27432" marB="27432" anchor="ctr">
+                    <a:solidFill>
+                      <a:srgbClr val="202630"/>
+                    </a:solidFill>
+                  </a:tcPr>
+                </a:tc>
+                <a:tc>
+                  <a:txBody>
+                    <a:bodyPr wrap="square"/>
+                    <a:lstStyle/>
+                    <a:p>
+                      <a:pPr algn="l"/>
+                      <a:r>
+                        <a:rPr sz="1800" b="0">
+                          <a:solidFill>
+                            <a:srgbClr val="FFFFFF"/>
+                          </a:solidFill>
+                          <a:latin typeface="Bricolage Grotesque"/>
+                        </a:rPr>
+                        <a:t>180</a:t>
+                      </a:r>
+                    </a:p>
+                  </a:txBody>
+                  <a:tcPr marL="128016" marR="73152" marT="27432" marB="27432" anchor="ctr">
+                    <a:solidFill>
+                      <a:srgbClr val="202630"/>
+                    </a:solidFill>
+                  </a:tcPr>
+                </a:tc>
+              </a:tr>
+            </a:tbl>
+          </a:graphicData>
+        </a:graphic>
+      </p:graphicFrame>
+      <p:sp>
+        <p:nvSpPr>
+          <p:cNvPr id="5" name="TextBox 4"/>
+          <p:cNvSpPr txBox="1"/>
+          <p:nvPr/>
+        </p:nvSpPr>
+        <p:spPr>
+          <a:xfrm>
+            <a:off x="777240" y="5980938"/>
+            <a:ext cx="6675120" cy="835660"/>
+          </a:xfrm>
+          <a:prstGeom prst="rect">
+            <a:avLst/>
+          </a:prstGeom>
+          <a:noFill/>
+        </p:spPr>
+        <p:txBody>
+          <a:bodyPr wrap="square" anchor="t" lIns="0" rIns="0" tIns="0" bIns="0">
+            <a:spAutoFit/>
+          </a:bodyPr>
+          <a:lstStyle/>
+          <a:p>
+            <a:pPr algn="l">
+              <a:lnSpc>
+                <a:spcPct val="110000"/>
+              </a:lnSpc>
+            </a:pPr>
+            <a:r>
+              <a:rPr sz="2200" b="0">
                 <a:solidFill>
                   <a:srgbClr val="14181F"/>
                 </a:solidFill>
                 <a:latin typeface="Hanken Grotesk"/>
               </a:rPr>
-              <a:t>PRODUCTO</a:t>
-            </a:r>
-          </a:p>
-        </p:txBody>
-      </p:sp>
-      <p:sp>
-        <p:nvSpPr>
-          <p:cNvPr id="4" name="Rectangle 3"/>
+              <a:t>Super = la más económica.</a:t>
+            </a:r>
+          </a:p>
+        </p:txBody>
+      </p:sp>
+    </p:spTree>
+  </p:cSld>
+  <p:clrMapOvr>
+    <a:masterClrMapping/>
+  </p:clrMapOvr>
+</p:sld>
+</file>
+
+<file path=ppt/slides/slide4.xml><?xml version="1.0" encoding="utf-8"?>
+<p:sld xmlns:a="http://schemas.openxmlformats.org/drawingml/2006/main" xmlns:p="http://schemas.openxmlformats.org/presentationml/2006/main" xmlns:r="http://schemas.openxmlformats.org/officeDocument/2006/relationships">
+  <p:cSld>
+    <p:bg>
+      <p:bgPr>
+        <a:solidFill>
+          <a:srgbClr val="14181F"/>
+        </a:solidFill>
+        <a:effectLst/>
+      </p:bgPr>
+    </p:bg>
+    <p:spTree>
+      <p:nvGrpSpPr>
+        <p:cNvPr id="1" name=""/>
+        <p:cNvGrpSpPr/>
+        <p:nvPr/>
+      </p:nvGrpSpPr>
+      <p:grpSpPr/>
+      <p:sp>
+        <p:nvSpPr>
+          <p:cNvPr id="2" name="Rounded Rectangle 1"/>
           <p:cNvSpPr/>
           <p:nvPr/>
         </p:nvSpPr>
         <p:spPr>
           <a:xfrm>
-            <a:off x="777240" y="1280160"/>
+            <a:off x="777240" y="777240"/>
+            <a:ext cx="2018538" cy="373380"/>
+          </a:xfrm>
+          <a:prstGeom prst="roundRect">
+            <a:avLst>
+              <a:gd name="adj" fmla="val 50000"/>
+            </a:avLst>
+          </a:prstGeom>
+          <a:solidFill>
+            <a:srgbClr val="F5C13F"/>
+          </a:solidFill>
+          <a:ln>
+            <a:noFill/>
+          </a:ln>
+          <a:effectLst/>
+        </p:spPr>
+        <p:style>
+          <a:lnRef idx="1">
+            <a:schemeClr val="accent1"/>
+          </a:lnRef>
+          <a:fillRef idx="3">
+            <a:schemeClr val="accent1"/>
+          </a:fillRef>
+          <a:effectRef idx="2">
+            <a:schemeClr val="accent1"/>
+          </a:effectRef>
+          <a:fontRef idx="minor">
+            <a:schemeClr val="lt1"/>
+          </a:fontRef>
+        </p:style>
+        <p:txBody>
+          <a:bodyPr rtlCol="0" anchor="ctr" wrap="none" lIns="128016" rIns="128016" tIns="18288" bIns="18288"/>
+          <a:lstStyle/>
+          <a:p>
+            <a:pPr algn="ctr"/>
+            <a:r>
+              <a:rPr sz="1500" b="1">
+                <a:solidFill>
+                  <a:srgbClr val="14181F"/>
+                </a:solidFill>
+                <a:latin typeface="Bricolage Grotesque"/>
+              </a:rPr>
+              <a:t>MISMA CALIDAD</a:t>
+            </a:r>
+          </a:p>
+        </p:txBody>
+      </p:sp>
+      <p:sp>
+        <p:nvSpPr>
+          <p:cNvPr id="3" name="Rectangle 2"/>
+          <p:cNvSpPr/>
+          <p:nvPr/>
+        </p:nvSpPr>
+        <p:spPr>
+          <a:xfrm>
+            <a:off x="777240" y="2002536"/>
+            <a:ext cx="1371600" cy="146304"/>
+          </a:xfrm>
+          <a:prstGeom prst="rect">
+            <a:avLst/>
+          </a:prstGeom>
+          <a:solidFill>
+            <a:srgbClr val="F5C13F"/>
+          </a:solidFill>
+          <a:ln>
+            <a:noFill/>
+          </a:ln>
+          <a:effectLst/>
+        </p:spPr>
+        <p:style>
+          <a:lnRef idx="1">
+            <a:schemeClr val="accent1"/>
+          </a:lnRef>
+          <a:fillRef idx="3">
+            <a:schemeClr val="accent1"/>
+          </a:fillRef>
+          <a:effectRef idx="2">
+            <a:schemeClr val="accent1"/>
+          </a:effectRef>
+          <a:fontRef idx="minor">
+            <a:schemeClr val="lt1"/>
+          </a:fontRef>
+        </p:style>
+        <p:txBody>
+          <a:bodyPr rtlCol="0" anchor="ctr"/>
+          <a:lstStyle/>
+          <a:p>
+            <a:pPr algn="ctr"/>
+          </a:p>
+        </p:txBody>
+      </p:sp>
+      <p:sp>
+        <p:nvSpPr>
+          <p:cNvPr id="4" name="TextBox 3"/>
+          <p:cNvSpPr txBox="1"/>
+          <p:nvPr/>
+        </p:nvSpPr>
+        <p:spPr>
+          <a:xfrm>
+            <a:off x="777240" y="2459736"/>
+            <a:ext cx="6675120" cy="2578608"/>
+          </a:xfrm>
+          <a:prstGeom prst="rect">
+            <a:avLst/>
+          </a:prstGeom>
+          <a:noFill/>
+        </p:spPr>
+        <p:txBody>
+          <a:bodyPr wrap="square" anchor="t" lIns="0" rIns="0" tIns="0" bIns="0">
+            <a:spAutoFit/>
+          </a:bodyPr>
+          <a:lstStyle/>
+          <a:p>
+            <a:pPr algn="l">
+              <a:lnSpc>
+                <a:spcPct val="100000"/>
+              </a:lnSpc>
+            </a:pPr>
+            <a:r>
+              <a:rPr sz="4800" b="1">
+                <a:solidFill>
+                  <a:srgbClr val="FFFFFF"/>
+                </a:solidFill>
+                <a:latin typeface="Bricolage Grotesque"/>
+              </a:rPr>
+              <a:t>Blanco o color: misma calidad.</a:t>
+            </a:r>
+          </a:p>
+        </p:txBody>
+      </p:sp>
+      <p:sp>
+        <p:nvSpPr>
+          <p:cNvPr id="5" name="TextBox 4"/>
+          <p:cNvSpPr txBox="1"/>
+          <p:nvPr/>
+        </p:nvSpPr>
+        <p:spPr>
+          <a:xfrm>
+            <a:off x="777240" y="5038344"/>
+            <a:ext cx="6675120" cy="1530858"/>
+          </a:xfrm>
+          <a:prstGeom prst="rect">
+            <a:avLst/>
+          </a:prstGeom>
+          <a:noFill/>
+        </p:spPr>
+        <p:txBody>
+          <a:bodyPr wrap="square" anchor="t" lIns="0" rIns="0" tIns="0" bIns="0">
+            <a:spAutoFit/>
+          </a:bodyPr>
+          <a:lstStyle/>
+          <a:p>
+            <a:pPr algn="l">
+              <a:lnSpc>
+                <a:spcPct val="110000"/>
+              </a:lnSpc>
+            </a:pPr>
+            <a:r>
+              <a:rPr sz="2600" b="0">
+                <a:solidFill>
+                  <a:srgbClr val="FFFFFF"/>
+                </a:solidFill>
+                <a:latin typeface="Hanken Grotesk"/>
+              </a:rPr>
+              <a:t>Cambia el color de la cáscara, no el sabor. Elige por gusto.</a:t>
+            </a:r>
+          </a:p>
+        </p:txBody>
+      </p:sp>
+    </p:spTree>
+  </p:cSld>
+  <p:clrMapOvr>
+    <a:masterClrMapping/>
+  </p:clrMapOvr>
+</p:sld>
+</file>
+
+<file path=ppt/slides/slide5.xml><?xml version="1.0" encoding="utf-8"?>
+<p:sld xmlns:a="http://schemas.openxmlformats.org/drawingml/2006/main" xmlns:p="http://schemas.openxmlformats.org/presentationml/2006/main" xmlns:r="http://schemas.openxmlformats.org/officeDocument/2006/relationships">
+  <p:cSld>
+    <p:bg>
+      <p:bgPr>
+        <a:solidFill>
+          <a:srgbClr val="F5C13F"/>
+        </a:solidFill>
+        <a:effectLst/>
+      </p:bgPr>
+    </p:bg>
+    <p:spTree>
+      <p:nvGrpSpPr>
+        <p:cNvPr id="1" name=""/>
+        <p:cNvGrpSpPr/>
+        <p:nvPr/>
+      </p:nvGrpSpPr>
+      <p:grpSpPr/>
+      <p:sp>
+        <p:nvSpPr>
+          <p:cNvPr id="2" name="Rounded Rectangle 1"/>
+          <p:cNvSpPr/>
+          <p:nvPr/>
+        </p:nvSpPr>
+        <p:spPr>
+          <a:xfrm>
+            <a:off x="777240" y="777240"/>
+            <a:ext cx="1012698" cy="373380"/>
+          </a:xfrm>
+          <a:prstGeom prst="roundRect">
+            <a:avLst>
+              <a:gd name="adj" fmla="val 50000"/>
+            </a:avLst>
+          </a:prstGeom>
+          <a:solidFill>
+            <a:srgbClr val="14181F"/>
+          </a:solidFill>
+          <a:ln>
+            <a:noFill/>
+          </a:ln>
+          <a:effectLst/>
+        </p:spPr>
+        <p:style>
+          <a:lnRef idx="1">
+            <a:schemeClr val="accent1"/>
+          </a:lnRef>
+          <a:fillRef idx="3">
+            <a:schemeClr val="accent1"/>
+          </a:fillRef>
+          <a:effectRef idx="2">
+            <a:schemeClr val="accent1"/>
+          </a:effectRef>
+          <a:fontRef idx="minor">
+            <a:schemeClr val="lt1"/>
+          </a:fontRef>
+        </p:style>
+        <p:txBody>
+          <a:bodyPr rtlCol="0" anchor="ctr" wrap="none" lIns="128016" rIns="128016" tIns="18288" bIns="18288"/>
+          <a:lstStyle/>
+          <a:p>
+            <a:pPr algn="ctr"/>
+            <a:r>
+              <a:rPr sz="1500" b="1">
+                <a:solidFill>
+                  <a:srgbClr val="F5C13F"/>
+                </a:solidFill>
+                <a:latin typeface="Bricolage Grotesque"/>
+              </a:rPr>
+              <a:t>ELIGE</a:t>
+            </a:r>
+          </a:p>
+        </p:txBody>
+      </p:sp>
+      <p:sp>
+        <p:nvSpPr>
+          <p:cNvPr id="3" name="Rectangle 2"/>
+          <p:cNvSpPr/>
+          <p:nvPr/>
+        </p:nvSpPr>
+        <p:spPr>
+          <a:xfrm>
+            <a:off x="777240" y="1907286"/>
             <a:ext cx="1371600" cy="146304"/>
           </a:xfrm>
           <a:prstGeom prst="rect">
@@ -3231,14 +4293,14 @@
       </p:sp>
       <p:sp>
         <p:nvSpPr>
-          <p:cNvPr id="5" name="TextBox 4"/>
+          <p:cNvPr id="4" name="TextBox 3"/>
           <p:cNvSpPr txBox="1"/>
           <p:nvPr/>
         </p:nvSpPr>
         <p:spPr>
           <a:xfrm>
-            <a:off x="777240" y="1737360"/>
-            <a:ext cx="6675120" cy="4229608"/>
+            <a:off x="777240" y="2364486"/>
+            <a:ext cx="6675120" cy="2769108"/>
           </a:xfrm>
           <a:prstGeom prst="rect">
             <a:avLst/>
@@ -3257,1025 +4319,7 @@
               </a:lnSpc>
             </a:pPr>
             <a:r>
-              <a:rPr sz="6200" b="1">
-                <a:solidFill>
-                  <a:srgbClr val="14181F"/>
-                </a:solidFill>
-                <a:latin typeface="Bricolage Grotesque"/>
-              </a:rPr>
-              <a:t>Conoce las cajas de Huevera 🥚</a:t>
-            </a:r>
-          </a:p>
-        </p:txBody>
-      </p:sp>
-      <p:sp>
-        <p:nvSpPr>
-          <p:cNvPr id="6" name="TextBox 5"/>
-          <p:cNvSpPr txBox="1"/>
-          <p:nvPr/>
-        </p:nvSpPr>
-        <p:spPr>
-          <a:xfrm>
-            <a:off x="777240" y="5877052"/>
-            <a:ext cx="6675120" cy="1118108"/>
-          </a:xfrm>
-          <a:prstGeom prst="rect">
-            <a:avLst/>
-          </a:prstGeom>
-          <a:noFill/>
-        </p:spPr>
-        <p:txBody>
-          <a:bodyPr wrap="square" anchor="t" lIns="0" rIns="0" tIns="0" bIns="0">
-            <a:spAutoFit/>
-          </a:bodyPr>
-          <a:lstStyle/>
-          <a:p>
-            <a:pPr algn="l">
-              <a:lnSpc>
-                <a:spcPct val="110000"/>
-              </a:lnSpc>
-            </a:pPr>
-            <a:r>
-              <a:rPr sz="2600" b="0">
-                <a:solidFill>
-                  <a:srgbClr val="14181F"/>
-                </a:solidFill>
-                <a:latin typeface="Hanken Grotesk"/>
-              </a:rPr>
-              <a:t>Elige la tuya.</a:t>
-            </a:r>
-          </a:p>
-        </p:txBody>
-      </p:sp>
-      <p:sp>
-        <p:nvSpPr>
-          <p:cNvPr id="7" name="TextBox 6"/>
-          <p:cNvSpPr txBox="1"/>
-          <p:nvPr/>
-        </p:nvSpPr>
-        <p:spPr>
-          <a:xfrm>
-            <a:off x="777240" y="7269480"/>
-            <a:ext cx="6675120" cy="548640"/>
-          </a:xfrm>
-          <a:prstGeom prst="rect">
-            <a:avLst/>
-          </a:prstGeom>
-          <a:noFill/>
-        </p:spPr>
-        <p:txBody>
-          <a:bodyPr wrap="square" anchor="t" lIns="0" rIns="0" tIns="0" bIns="0">
-            <a:spAutoFit/>
-          </a:bodyPr>
-          <a:lstStyle/>
-          <a:p>
-            <a:pPr algn="l">
-              <a:lnSpc>
-                <a:spcPct val="100000"/>
-              </a:lnSpc>
-            </a:pPr>
-            <a:r>
-              <a:rPr sz="1800" b="1">
-                <a:solidFill>
-                  <a:srgbClr val="14181F"/>
-                </a:solidFill>
-                <a:latin typeface="Bricolage Grotesque"/>
-              </a:rPr>
-              <a:t>●  </a:t>
-            </a:r>
-            <a:r>
-              <a:rPr sz="1800" b="1">
-                <a:solidFill>
-                  <a:srgbClr val="14181F"/>
-                </a:solidFill>
-                <a:latin typeface="Bricolage Grotesque"/>
-              </a:rPr>
-              <a:t>Huevera   @huevera.cl</a:t>
-            </a:r>
-          </a:p>
-        </p:txBody>
-      </p:sp>
-      <p:sp>
-        <p:nvSpPr>
-          <p:cNvPr id="8" name="TextBox 7"/>
-          <p:cNvSpPr txBox="1"/>
-          <p:nvPr/>
-        </p:nvSpPr>
-        <p:spPr>
-          <a:xfrm>
-            <a:off x="5166360" y="7223760"/>
-            <a:ext cx="2286000" cy="548640"/>
-          </a:xfrm>
-          <a:prstGeom prst="rect">
-            <a:avLst/>
-          </a:prstGeom>
-          <a:noFill/>
-        </p:spPr>
-        <p:txBody>
-          <a:bodyPr wrap="square" anchor="t" lIns="0" rIns="0" tIns="0" bIns="0">
-            <a:spAutoFit/>
-          </a:bodyPr>
-          <a:lstStyle/>
-          <a:p>
-            <a:pPr algn="r">
-              <a:lnSpc>
-                <a:spcPct val="100000"/>
-              </a:lnSpc>
-            </a:pPr>
-            <a:r>
-              <a:rPr sz="2000" b="1">
-                <a:solidFill>
-                  <a:srgbClr val="14181F"/>
-                </a:solidFill>
-                <a:latin typeface="Bricolage Grotesque"/>
-              </a:rPr>
-              <a:t>Desliza →</a:t>
-            </a:r>
-          </a:p>
-        </p:txBody>
-      </p:sp>
-    </p:spTree>
-  </p:cSld>
-  <p:clrMapOvr>
-    <a:masterClrMapping/>
-  </p:clrMapOvr>
-</p:sld>
-</file>
-
-<file path=ppt/slides/slide2.xml><?xml version="1.0" encoding="utf-8"?>
-<p:sld xmlns:a="http://schemas.openxmlformats.org/drawingml/2006/main" xmlns:p="http://schemas.openxmlformats.org/presentationml/2006/main" xmlns:r="http://schemas.openxmlformats.org/officeDocument/2006/relationships">
-  <p:cSld>
-    <p:bg>
-      <p:bgPr>
-        <a:solidFill>
-          <a:srgbClr val="14181F"/>
-        </a:solidFill>
-        <a:effectLst/>
-      </p:bgPr>
-    </p:bg>
-    <p:spTree>
-      <p:nvGrpSpPr>
-        <p:cNvPr id="1" name=""/>
-        <p:cNvGrpSpPr/>
-        <p:nvPr/>
-      </p:nvGrpSpPr>
-      <p:grpSpPr/>
-      <p:sp>
-        <p:nvSpPr>
-          <p:cNvPr id="2" name="Oval 1"/>
-          <p:cNvSpPr/>
-          <p:nvPr/>
-        </p:nvSpPr>
-        <p:spPr>
-          <a:xfrm>
-            <a:off x="4518051" y="2874172"/>
-            <a:ext cx="6748272" cy="8637788"/>
-          </a:xfrm>
-          <a:prstGeom prst="ellipse">
-            <a:avLst/>
-          </a:prstGeom>
-          <a:solidFill>
-            <a:srgbClr val="F5C13F">
-              <a:alpha val="12000"/>
-            </a:srgbClr>
-          </a:solidFill>
-          <a:ln>
-            <a:noFill/>
-          </a:ln>
-          <a:effectLst/>
-        </p:spPr>
-        <p:style>
-          <a:lnRef idx="1">
-            <a:schemeClr val="accent1"/>
-          </a:lnRef>
-          <a:fillRef idx="3">
-            <a:schemeClr val="accent1"/>
-          </a:fillRef>
-          <a:effectRef idx="2">
-            <a:schemeClr val="accent1"/>
-          </a:effectRef>
-          <a:fontRef idx="minor">
-            <a:schemeClr val="lt1"/>
-          </a:fontRef>
-        </p:style>
-        <p:txBody>
-          <a:bodyPr rtlCol="0" anchor="ctr"/>
-          <a:lstStyle/>
-          <a:p>
-            <a:pPr algn="ctr"/>
-          </a:p>
-        </p:txBody>
-      </p:sp>
-      <p:sp>
-        <p:nvSpPr>
-          <p:cNvPr id="3" name="Oval 2"/>
-          <p:cNvSpPr/>
-          <p:nvPr/>
-        </p:nvSpPr>
-        <p:spPr>
-          <a:xfrm>
-            <a:off x="777240" y="1280160"/>
-            <a:ext cx="3200400" cy="3200400"/>
-          </a:xfrm>
-          <a:prstGeom prst="ellipse">
-            <a:avLst/>
-          </a:prstGeom>
-          <a:solidFill>
-            <a:srgbClr val="F5C13F"/>
-          </a:solidFill>
-          <a:ln>
-            <a:noFill/>
-          </a:ln>
-          <a:effectLst/>
-        </p:spPr>
-        <p:style>
-          <a:lnRef idx="1">
-            <a:schemeClr val="accent1"/>
-          </a:lnRef>
-          <a:fillRef idx="3">
-            <a:schemeClr val="accent1"/>
-          </a:fillRef>
-          <a:effectRef idx="2">
-            <a:schemeClr val="accent1"/>
-          </a:effectRef>
-          <a:fontRef idx="minor">
-            <a:schemeClr val="lt1"/>
-          </a:fontRef>
-        </p:style>
-        <p:txBody>
-          <a:bodyPr rtlCol="0" anchor="ctr"/>
-          <a:lstStyle/>
-          <a:p>
-            <a:pPr algn="ctr"/>
-          </a:p>
-        </p:txBody>
-      </p:sp>
-      <p:sp>
-        <p:nvSpPr>
-          <p:cNvPr id="4" name="TextBox 3"/>
-          <p:cNvSpPr txBox="1"/>
-          <p:nvPr/>
-        </p:nvSpPr>
-        <p:spPr>
-          <a:xfrm>
-            <a:off x="777240" y="1280160"/>
-            <a:ext cx="3200400" cy="3200400"/>
-          </a:xfrm>
-          <a:prstGeom prst="rect">
-            <a:avLst/>
-          </a:prstGeom>
-          <a:noFill/>
-        </p:spPr>
-        <p:txBody>
-          <a:bodyPr wrap="square" anchor="ctr" lIns="0" rIns="0" tIns="0" bIns="0">
-            <a:spAutoFit/>
-          </a:bodyPr>
-          <a:lstStyle/>
-          <a:p>
-            <a:pPr algn="ctr">
-              <a:lnSpc>
-                <a:spcPct val="90000"/>
-              </a:lnSpc>
-            </a:pPr>
-            <a:r>
-              <a:rPr sz="9600" b="1">
-                <a:solidFill>
-                  <a:srgbClr val="14181F"/>
-                </a:solidFill>
-                <a:latin typeface="Bricolage Grotesque"/>
-              </a:rPr>
-              <a:t>100</a:t>
-            </a:r>
-          </a:p>
-        </p:txBody>
-      </p:sp>
-      <p:sp>
-        <p:nvSpPr>
-          <p:cNvPr id="5" name="TextBox 4"/>
-          <p:cNvSpPr txBox="1"/>
-          <p:nvPr/>
-        </p:nvSpPr>
-        <p:spPr>
-          <a:xfrm>
-            <a:off x="777240" y="4937760"/>
-            <a:ext cx="6675120" cy="457200"/>
-          </a:xfrm>
-          <a:prstGeom prst="rect">
-            <a:avLst/>
-          </a:prstGeom>
-          <a:noFill/>
-        </p:spPr>
-        <p:txBody>
-          <a:bodyPr wrap="square" anchor="t" lIns="0" rIns="0" tIns="0" bIns="0">
-            <a:spAutoFit/>
-          </a:bodyPr>
-          <a:lstStyle/>
-          <a:p>
-            <a:pPr algn="l">
-              <a:lnSpc>
-                <a:spcPct val="100000"/>
-              </a:lnSpc>
-            </a:pPr>
-            <a:r>
-              <a:rPr sz="1800" b="1">
-                <a:solidFill>
-                  <a:srgbClr val="F5C13F"/>
-                </a:solidFill>
-                <a:latin typeface="Hanken Grotesk"/>
-              </a:rPr>
-              <a:t>CAJA SUPER</a:t>
-            </a:r>
-          </a:p>
-        </p:txBody>
-      </p:sp>
-      <p:sp>
-        <p:nvSpPr>
-          <p:cNvPr id="6" name="TextBox 5"/>
-          <p:cNvSpPr txBox="1"/>
-          <p:nvPr/>
-        </p:nvSpPr>
-        <p:spPr>
-          <a:xfrm>
-            <a:off x="777240" y="5577840"/>
-            <a:ext cx="6675120" cy="2388107"/>
-          </a:xfrm>
-          <a:prstGeom prst="rect">
-            <a:avLst/>
-          </a:prstGeom>
-          <a:noFill/>
-        </p:spPr>
-        <p:txBody>
-          <a:bodyPr wrap="square" anchor="t" lIns="0" rIns="0" tIns="0" bIns="0">
-            <a:spAutoFit/>
-          </a:bodyPr>
-          <a:lstStyle/>
-          <a:p>
-            <a:pPr algn="l">
-              <a:lnSpc>
-                <a:spcPct val="100000"/>
-              </a:lnSpc>
-            </a:pPr>
-            <a:r>
-              <a:rPr sz="4400" b="1">
-                <a:solidFill>
-                  <a:srgbClr val="FFFFFF"/>
-                </a:solidFill>
-                <a:latin typeface="Bricolage Grotesque"/>
-              </a:rPr>
-              <a:t>100 huevos — la más económica.</a:t>
-            </a:r>
-          </a:p>
-        </p:txBody>
-      </p:sp>
-      <p:sp>
-        <p:nvSpPr>
-          <p:cNvPr id="7" name="TextBox 6"/>
-          <p:cNvSpPr txBox="1"/>
-          <p:nvPr/>
-        </p:nvSpPr>
-        <p:spPr>
-          <a:xfrm>
-            <a:off x="777240" y="7965947"/>
-            <a:ext cx="6675120" cy="899160"/>
-          </a:xfrm>
-          <a:prstGeom prst="rect">
-            <a:avLst/>
-          </a:prstGeom>
-          <a:noFill/>
-        </p:spPr>
-        <p:txBody>
-          <a:bodyPr wrap="square" anchor="t" lIns="0" rIns="0" tIns="0" bIns="0">
-            <a:spAutoFit/>
-          </a:bodyPr>
-          <a:lstStyle/>
-          <a:p>
-            <a:pPr algn="l">
-              <a:lnSpc>
-                <a:spcPct val="110000"/>
-              </a:lnSpc>
-            </a:pPr>
-            <a:r>
-              <a:rPr sz="2400" b="0">
-                <a:solidFill>
-                  <a:srgbClr val="FFFFFF"/>
-                </a:solidFill>
-                <a:latin typeface="Hanken Grotesk"/>
-              </a:rPr>
-              <a:t>Para abastecer la casa.</a:t>
-            </a:r>
-          </a:p>
-        </p:txBody>
-      </p:sp>
-    </p:spTree>
-  </p:cSld>
-  <p:clrMapOvr>
-    <a:masterClrMapping/>
-  </p:clrMapOvr>
-</p:sld>
-</file>
-
-<file path=ppt/slides/slide3.xml><?xml version="1.0" encoding="utf-8"?>
-<p:sld xmlns:a="http://schemas.openxmlformats.org/drawingml/2006/main" xmlns:p="http://schemas.openxmlformats.org/presentationml/2006/main" xmlns:r="http://schemas.openxmlformats.org/officeDocument/2006/relationships">
-  <p:cSld>
-    <p:bg>
-      <p:bgPr>
-        <a:solidFill>
-          <a:srgbClr val="14181F"/>
-        </a:solidFill>
-        <a:effectLst/>
-      </p:bgPr>
-    </p:bg>
-    <p:spTree>
-      <p:nvGrpSpPr>
-        <p:cNvPr id="1" name=""/>
-        <p:cNvGrpSpPr/>
-        <p:nvPr/>
-      </p:nvGrpSpPr>
-      <p:grpSpPr/>
-      <p:sp>
-        <p:nvSpPr>
-          <p:cNvPr id="2" name="TextBox 1"/>
-          <p:cNvSpPr txBox="1"/>
-          <p:nvPr/>
-        </p:nvSpPr>
-        <p:spPr>
-          <a:xfrm>
-            <a:off x="777240" y="777240"/>
-            <a:ext cx="6675120" cy="457200"/>
-          </a:xfrm>
-          <a:prstGeom prst="rect">
-            <a:avLst/>
-          </a:prstGeom>
-          <a:noFill/>
-        </p:spPr>
-        <p:txBody>
-          <a:bodyPr wrap="square" anchor="t" lIns="0" rIns="0" tIns="0" bIns="0">
-            <a:spAutoFit/>
-          </a:bodyPr>
-          <a:lstStyle/>
-          <a:p>
-            <a:pPr algn="l">
-              <a:lnSpc>
-                <a:spcPct val="100000"/>
-              </a:lnSpc>
-            </a:pPr>
-            <a:r>
-              <a:rPr sz="1800" b="1">
-                <a:solidFill>
-                  <a:srgbClr val="F5C13F"/>
-                </a:solidFill>
-                <a:latin typeface="Hanken Grotesk"/>
-              </a:rPr>
-              <a:t>LAS 3 CAJAS</a:t>
-            </a:r>
-          </a:p>
-        </p:txBody>
-      </p:sp>
-      <p:sp>
-        <p:nvSpPr>
-          <p:cNvPr id="3" name="TextBox 2"/>
-          <p:cNvSpPr txBox="1"/>
-          <p:nvPr/>
-        </p:nvSpPr>
-        <p:spPr>
-          <a:xfrm>
-            <a:off x="777240" y="1417320"/>
-            <a:ext cx="6675120" cy="2292858"/>
-          </a:xfrm>
-          <a:prstGeom prst="rect">
-            <a:avLst/>
-          </a:prstGeom>
-          <a:noFill/>
-        </p:spPr>
-        <p:txBody>
-          <a:bodyPr wrap="square" anchor="t" lIns="0" rIns="0" tIns="0" bIns="0">
-            <a:spAutoFit/>
-          </a:bodyPr>
-          <a:lstStyle/>
-          <a:p>
-            <a:pPr algn="l">
-              <a:lnSpc>
-                <a:spcPct val="100000"/>
-              </a:lnSpc>
-            </a:pPr>
-            <a:r>
-              <a:rPr sz="4200" b="1">
-                <a:solidFill>
-                  <a:srgbClr val="FFFFFF"/>
-                </a:solidFill>
-                <a:latin typeface="Bricolage Grotesque"/>
-              </a:rPr>
-              <a:t>Elige según cuánto consumes</a:t>
-            </a:r>
-          </a:p>
-        </p:txBody>
-      </p:sp>
-      <p:graphicFrame>
-        <p:nvGraphicFramePr>
-          <p:cNvPr id="4" name="Table 3"/>
-          <p:cNvGraphicFramePr>
-            <a:graphicFrameLocks noGrp="1"/>
-          </p:cNvGraphicFramePr>
-          <p:nvPr/>
-        </p:nvGraphicFramePr>
-        <p:xfrm>
-          <a:off x="777240" y="3710178"/>
-          <a:ext cx="6675120" cy="2468880"/>
-        </p:xfrm>
-        <a:graphic>
-          <a:graphicData uri="http://schemas.openxmlformats.org/drawingml/2006/table">
-            <a:tbl>
-              <a:tblPr firstRow="1">
-                <a:tableStyleId>{5C22544A-7EE6-4342-B048-85BDC9FD1C3A}</a:tableStyleId>
-              </a:tblPr>
-              <a:tblGrid>
-                <a:gridCol w="4171950"/>
-                <a:gridCol w="2503170"/>
-              </a:tblGrid>
-              <a:tr h="548640">
-                <a:tc>
-                  <a:txBody>
-                    <a:bodyPr wrap="square"/>
-                    <a:lstStyle/>
-                    <a:p>
-                      <a:pPr algn="l"/>
-                      <a:r>
-                        <a:rPr sz="1700" b="1">
-                          <a:solidFill>
-                            <a:srgbClr val="14181F"/>
-                          </a:solidFill>
-                          <a:latin typeface="Bricolage Grotesque"/>
-                        </a:rPr>
-                        <a:t>Caja</a:t>
-                      </a:r>
-                    </a:p>
-                  </a:txBody>
-                  <a:tcPr marL="128016" marR="73152" marT="27432" marB="27432" anchor="ctr">
-                    <a:solidFill>
-                      <a:srgbClr val="F5C13F"/>
-                    </a:solidFill>
-                  </a:tcPr>
-                </a:tc>
-                <a:tc>
-                  <a:txBody>
-                    <a:bodyPr wrap="square"/>
-                    <a:lstStyle/>
-                    <a:p>
-                      <a:pPr algn="l"/>
-                      <a:r>
-                        <a:rPr sz="1700" b="1">
-                          <a:solidFill>
-                            <a:srgbClr val="14181F"/>
-                          </a:solidFill>
-                          <a:latin typeface="Bricolage Grotesque"/>
-                        </a:rPr>
-                        <a:t>Huevos</a:t>
-                      </a:r>
-                    </a:p>
-                  </a:txBody>
-                  <a:tcPr marL="128016" marR="73152" marT="27432" marB="27432" anchor="ctr">
-                    <a:solidFill>
-                      <a:srgbClr val="F5C13F"/>
-                    </a:solidFill>
-                  </a:tcPr>
-                </a:tc>
-              </a:tr>
-              <a:tr h="640080">
-                <a:tc>
-                  <a:txBody>
-                    <a:bodyPr wrap="square"/>
-                    <a:lstStyle/>
-                    <a:p>
-                      <a:pPr algn="l"/>
-                      <a:r>
-                        <a:rPr sz="2000" b="1">
-                          <a:solidFill>
-                            <a:srgbClr val="F5C13F"/>
-                          </a:solidFill>
-                          <a:latin typeface="Bricolage Grotesque"/>
-                        </a:rPr>
-                        <a:t>Super</a:t>
-                      </a:r>
-                    </a:p>
-                  </a:txBody>
-                  <a:tcPr marL="128016" marR="73152" marT="27432" marB="27432" anchor="ctr">
-                    <a:solidFill>
-                      <a:srgbClr val="202630"/>
-                    </a:solidFill>
-                  </a:tcPr>
-                </a:tc>
-                <a:tc>
-                  <a:txBody>
-                    <a:bodyPr wrap="square"/>
-                    <a:lstStyle/>
-                    <a:p>
-                      <a:pPr algn="l"/>
-                      <a:r>
-                        <a:rPr sz="2000" b="0">
-                          <a:solidFill>
-                            <a:srgbClr val="FFFFFF"/>
-                          </a:solidFill>
-                          <a:latin typeface="Bricolage Grotesque"/>
-                        </a:rPr>
-                        <a:t>100</a:t>
-                      </a:r>
-                    </a:p>
-                  </a:txBody>
-                  <a:tcPr marL="128016" marR="73152" marT="27432" marB="27432" anchor="ctr">
-                    <a:solidFill>
-                      <a:srgbClr val="202630"/>
-                    </a:solidFill>
-                  </a:tcPr>
-                </a:tc>
-              </a:tr>
-              <a:tr h="640080">
-                <a:tc>
-                  <a:txBody>
-                    <a:bodyPr wrap="square"/>
-                    <a:lstStyle/>
-                    <a:p>
-                      <a:pPr algn="l"/>
-                      <a:r>
-                        <a:rPr sz="2000" b="1">
-                          <a:solidFill>
-                            <a:srgbClr val="F5C13F"/>
-                          </a:solidFill>
-                          <a:latin typeface="Bricolage Grotesque"/>
-                        </a:rPr>
-                        <a:t>Blanco</a:t>
-                      </a:r>
-                    </a:p>
-                  </a:txBody>
-                  <a:tcPr marL="128016" marR="73152" marT="27432" marB="27432" anchor="ctr">
-                    <a:solidFill>
-                      <a:srgbClr val="14181F"/>
-                    </a:solidFill>
-                  </a:tcPr>
-                </a:tc>
-                <a:tc>
-                  <a:txBody>
-                    <a:bodyPr wrap="square"/>
-                    <a:lstStyle/>
-                    <a:p>
-                      <a:pPr algn="l"/>
-                      <a:r>
-                        <a:rPr sz="2000" b="0">
-                          <a:solidFill>
-                            <a:srgbClr val="FFFFFF"/>
-                          </a:solidFill>
-                          <a:latin typeface="Bricolage Grotesque"/>
-                        </a:rPr>
-                        <a:t>180</a:t>
-                      </a:r>
-                    </a:p>
-                  </a:txBody>
-                  <a:tcPr marL="128016" marR="73152" marT="27432" marB="27432" anchor="ctr">
-                    <a:solidFill>
-                      <a:srgbClr val="14181F"/>
-                    </a:solidFill>
-                  </a:tcPr>
-                </a:tc>
-              </a:tr>
-              <a:tr h="640080">
-                <a:tc>
-                  <a:txBody>
-                    <a:bodyPr wrap="square"/>
-                    <a:lstStyle/>
-                    <a:p>
-                      <a:pPr algn="l"/>
-                      <a:r>
-                        <a:rPr sz="2000" b="1">
-                          <a:solidFill>
-                            <a:srgbClr val="F5C13F"/>
-                          </a:solidFill>
-                          <a:latin typeface="Bricolage Grotesque"/>
-                        </a:rPr>
-                        <a:t>Color</a:t>
-                      </a:r>
-                    </a:p>
-                  </a:txBody>
-                  <a:tcPr marL="128016" marR="73152" marT="27432" marB="27432" anchor="ctr">
-                    <a:solidFill>
-                      <a:srgbClr val="202630"/>
-                    </a:solidFill>
-                  </a:tcPr>
-                </a:tc>
-                <a:tc>
-                  <a:txBody>
-                    <a:bodyPr wrap="square"/>
-                    <a:lstStyle/>
-                    <a:p>
-                      <a:pPr algn="l"/>
-                      <a:r>
-                        <a:rPr sz="2000" b="0">
-                          <a:solidFill>
-                            <a:srgbClr val="FFFFFF"/>
-                          </a:solidFill>
-                          <a:latin typeface="Bricolage Grotesque"/>
-                        </a:rPr>
-                        <a:t>180</a:t>
-                      </a:r>
-                    </a:p>
-                  </a:txBody>
-                  <a:tcPr marL="128016" marR="73152" marT="27432" marB="27432" anchor="ctr">
-                    <a:solidFill>
-                      <a:srgbClr val="202630"/>
-                    </a:solidFill>
-                  </a:tcPr>
-                </a:tc>
-              </a:tr>
-            </a:tbl>
-          </a:graphicData>
-        </a:graphic>
-      </p:graphicFrame>
-      <p:sp>
-        <p:nvSpPr>
-          <p:cNvPr id="5" name="TextBox 4"/>
-          <p:cNvSpPr txBox="1"/>
-          <p:nvPr/>
-        </p:nvSpPr>
-        <p:spPr>
-          <a:xfrm>
-            <a:off x="777240" y="6453377"/>
-            <a:ext cx="6675120" cy="835660"/>
-          </a:xfrm>
-          <a:prstGeom prst="rect">
-            <a:avLst/>
-          </a:prstGeom>
-          <a:noFill/>
-        </p:spPr>
-        <p:txBody>
-          <a:bodyPr wrap="square" anchor="t" lIns="0" rIns="0" tIns="0" bIns="0">
-            <a:spAutoFit/>
-          </a:bodyPr>
-          <a:lstStyle/>
-          <a:p>
-            <a:pPr algn="l">
-              <a:lnSpc>
-                <a:spcPct val="110000"/>
-              </a:lnSpc>
-            </a:pPr>
-            <a:r>
-              <a:rPr sz="2200" b="0">
-                <a:solidFill>
-                  <a:srgbClr val="FFFFFF"/>
-                </a:solidFill>
-                <a:latin typeface="Hanken Grotesk"/>
-              </a:rPr>
-              <a:t>Super = la más económica.</a:t>
-            </a:r>
-          </a:p>
-        </p:txBody>
-      </p:sp>
-    </p:spTree>
-  </p:cSld>
-  <p:clrMapOvr>
-    <a:masterClrMapping/>
-  </p:clrMapOvr>
-</p:sld>
-</file>
-
-<file path=ppt/slides/slide4.xml><?xml version="1.0" encoding="utf-8"?>
-<p:sld xmlns:a="http://schemas.openxmlformats.org/drawingml/2006/main" xmlns:p="http://schemas.openxmlformats.org/presentationml/2006/main" xmlns:r="http://schemas.openxmlformats.org/officeDocument/2006/relationships">
-  <p:cSld>
-    <p:bg>
-      <p:bgPr>
-        <a:solidFill>
-          <a:srgbClr val="FFFFFF"/>
-        </a:solidFill>
-        <a:effectLst/>
-      </p:bgPr>
-    </p:bg>
-    <p:spTree>
-      <p:nvGrpSpPr>
-        <p:cNvPr id="1" name=""/>
-        <p:cNvGrpSpPr/>
-        <p:nvPr/>
-      </p:nvGrpSpPr>
-      <p:grpSpPr/>
-      <p:sp>
-        <p:nvSpPr>
-          <p:cNvPr id="2" name="TextBox 1"/>
-          <p:cNvSpPr txBox="1"/>
-          <p:nvPr/>
-        </p:nvSpPr>
-        <p:spPr>
-          <a:xfrm>
-            <a:off x="777240" y="2060067"/>
-            <a:ext cx="6675120" cy="2578608"/>
-          </a:xfrm>
-          <a:prstGeom prst="rect">
-            <a:avLst/>
-          </a:prstGeom>
-          <a:noFill/>
-        </p:spPr>
-        <p:txBody>
-          <a:bodyPr wrap="square" anchor="t" lIns="0" rIns="0" tIns="0" bIns="0">
-            <a:spAutoFit/>
-          </a:bodyPr>
-          <a:lstStyle/>
-          <a:p>
-            <a:pPr algn="ctr">
-              <a:lnSpc>
-                <a:spcPct val="100000"/>
-              </a:lnSpc>
-            </a:pPr>
-            <a:r>
-              <a:rPr sz="4800" b="1">
-                <a:solidFill>
-                  <a:srgbClr val="14181F"/>
-                </a:solidFill>
-                <a:latin typeface="Bricolage Grotesque"/>
-              </a:rPr>
-              <a:t>Blanco o color: misma calidad.</a:t>
-            </a:r>
-          </a:p>
-        </p:txBody>
-      </p:sp>
-      <p:sp>
-        <p:nvSpPr>
-          <p:cNvPr id="3" name="TextBox 2"/>
-          <p:cNvSpPr txBox="1"/>
-          <p:nvPr/>
-        </p:nvSpPr>
-        <p:spPr>
-          <a:xfrm>
-            <a:off x="777240" y="4638675"/>
-            <a:ext cx="6675120" cy="1530858"/>
-          </a:xfrm>
-          <a:prstGeom prst="rect">
-            <a:avLst/>
-          </a:prstGeom>
-          <a:noFill/>
-        </p:spPr>
-        <p:txBody>
-          <a:bodyPr wrap="square" anchor="t" lIns="0" rIns="0" tIns="0" bIns="0">
-            <a:spAutoFit/>
-          </a:bodyPr>
-          <a:lstStyle/>
-          <a:p>
-            <a:pPr algn="ctr">
-              <a:lnSpc>
-                <a:spcPct val="110000"/>
-              </a:lnSpc>
-            </a:pPr>
-            <a:r>
-              <a:rPr sz="2600" b="0">
-                <a:solidFill>
-                  <a:srgbClr val="14181F"/>
-                </a:solidFill>
-                <a:latin typeface="Hanken Grotesk"/>
-              </a:rPr>
-              <a:t>Cambia el color de la cáscara, no el sabor. Elige por gusto.</a:t>
-            </a:r>
-          </a:p>
-        </p:txBody>
-      </p:sp>
-    </p:spTree>
-  </p:cSld>
-  <p:clrMapOvr>
-    <a:masterClrMapping/>
-  </p:clrMapOvr>
-</p:sld>
-</file>
-
-<file path=ppt/slides/slide5.xml><?xml version="1.0" encoding="utf-8"?>
-<p:sld xmlns:a="http://schemas.openxmlformats.org/drawingml/2006/main" xmlns:p="http://schemas.openxmlformats.org/presentationml/2006/main" xmlns:r="http://schemas.openxmlformats.org/officeDocument/2006/relationships">
-  <p:cSld>
-    <p:bg>
-      <p:bgPr>
-        <a:solidFill>
-          <a:srgbClr val="F5C13F"/>
-        </a:solidFill>
-        <a:effectLst/>
-      </p:bgPr>
-    </p:bg>
-    <p:spTree>
-      <p:nvGrpSpPr>
-        <p:cNvPr id="1" name=""/>
-        <p:cNvGrpSpPr/>
-        <p:nvPr/>
-      </p:nvGrpSpPr>
-      <p:grpSpPr/>
-      <p:sp>
-        <p:nvSpPr>
-          <p:cNvPr id="2" name="Oval 1"/>
-          <p:cNvSpPr/>
-          <p:nvPr/>
-        </p:nvSpPr>
-        <p:spPr>
-          <a:xfrm>
-            <a:off x="-3036722" y="-2936847"/>
-            <a:ext cx="6748272" cy="8637788"/>
-          </a:xfrm>
-          <a:prstGeom prst="ellipse">
-            <a:avLst/>
-          </a:prstGeom>
-          <a:solidFill>
-            <a:srgbClr val="14181F">
-              <a:alpha val="16000"/>
-            </a:srgbClr>
-          </a:solidFill>
-          <a:ln>
-            <a:noFill/>
-          </a:ln>
-          <a:effectLst/>
-        </p:spPr>
-        <p:style>
-          <a:lnRef idx="1">
-            <a:schemeClr val="accent1"/>
-          </a:lnRef>
-          <a:fillRef idx="3">
-            <a:schemeClr val="accent1"/>
-          </a:fillRef>
-          <a:effectRef idx="2">
-            <a:schemeClr val="accent1"/>
-          </a:effectRef>
-          <a:fontRef idx="minor">
-            <a:schemeClr val="lt1"/>
-          </a:fontRef>
-        </p:style>
-        <p:txBody>
-          <a:bodyPr rtlCol="0" anchor="ctr"/>
-          <a:lstStyle/>
-          <a:p>
-            <a:pPr algn="ctr"/>
-          </a:p>
-        </p:txBody>
-      </p:sp>
-      <p:sp>
-        <p:nvSpPr>
-          <p:cNvPr id="3" name="Rectangle 2"/>
-          <p:cNvSpPr/>
-          <p:nvPr/>
-        </p:nvSpPr>
-        <p:spPr>
-          <a:xfrm>
-            <a:off x="777240" y="1812036"/>
-            <a:ext cx="1371600" cy="146304"/>
-          </a:xfrm>
-          <a:prstGeom prst="rect">
-            <a:avLst/>
-          </a:prstGeom>
-          <a:solidFill>
-            <a:srgbClr val="14181F"/>
-          </a:solidFill>
-          <a:ln>
-            <a:noFill/>
-          </a:ln>
-          <a:effectLst/>
-        </p:spPr>
-        <p:style>
-          <a:lnRef idx="1">
-            <a:schemeClr val="accent1"/>
-          </a:lnRef>
-          <a:fillRef idx="3">
-            <a:schemeClr val="accent1"/>
-          </a:fillRef>
-          <a:effectRef idx="2">
-            <a:schemeClr val="accent1"/>
-          </a:effectRef>
-          <a:fontRef idx="minor">
-            <a:schemeClr val="lt1"/>
-          </a:fontRef>
-        </p:style>
-        <p:txBody>
-          <a:bodyPr rtlCol="0" anchor="ctr"/>
-          <a:lstStyle/>
-          <a:p>
-            <a:pPr algn="ctr"/>
-          </a:p>
-        </p:txBody>
-      </p:sp>
-      <p:sp>
-        <p:nvSpPr>
-          <p:cNvPr id="4" name="TextBox 3"/>
-          <p:cNvSpPr txBox="1"/>
-          <p:nvPr/>
-        </p:nvSpPr>
-        <p:spPr>
-          <a:xfrm>
-            <a:off x="777240" y="2269236"/>
-            <a:ext cx="6675120" cy="2959607"/>
-          </a:xfrm>
-          <a:prstGeom prst="rect">
-            <a:avLst/>
-          </a:prstGeom>
-          <a:noFill/>
-        </p:spPr>
-        <p:txBody>
-          <a:bodyPr wrap="square" anchor="t" lIns="0" rIns="0" tIns="0" bIns="0">
-            <a:spAutoFit/>
-          </a:bodyPr>
-          <a:lstStyle/>
-          <a:p>
-            <a:pPr algn="l">
-              <a:lnSpc>
-                <a:spcPct val="100000"/>
-              </a:lnSpc>
-            </a:pPr>
-            <a:r>
-              <a:rPr sz="5600" b="1">
+              <a:rPr sz="5200" b="1">
                 <a:solidFill>
                   <a:srgbClr val="14181F"/>
                 </a:solidFill>
